--- a/decks/englit-gothic/englit-gothic_ch2_setting-and-atmosphere.pptx
+++ b/decks/englit-gothic/englit-gothic_ch2_setting-and-atmosphere.pptx
@@ -126,29 +126,29 @@
   <p:extLst>
     <p:ext uri="{521415D9-36F7-43E2-AB2F-B90AF26B5E84}">
       <p14:sectionLst xmlns:p14="http://schemas.microsoft.com/office/powerpoint/2010/main">
-        <p14:section name="Opening" id="{e63329ca-417d-1713-b4b5-492bfbf5d19c}">
+        <p14:section name="Opening" id="{5ed663d3-d704-34fd-87ac-9c845cce0241}">
           <p14:sldIdLst>
             <p14:sldId id="256"/>
           </p14:sldIdLst>
         </p14:section>
-        <p14:section name="Gate" id="{c996479d-d4e2-eeea-c010-a85ff3080bb4}">
+        <p14:section name="Gate" id="{abe6af0b-4da9-cfee-4c8f-a78e09c8b85b}">
           <p14:sldIdLst>
             <p14:sldId id="257"/>
             <p14:sldId id="258"/>
           </p14:sldIdLst>
         </p14:section>
-        <p14:section name="Pre-teach" id="{3f678b53-c594-cbb7-ec50-43a316f8ec6f}">
+        <p14:section name="Pre-teach" id="{766bae50-174e-884e-c50f-46bc2718463b}">
           <p14:sldIdLst>
             <p14:sldId id="259"/>
           </p14:sldIdLst>
         </p14:section>
-        <p14:section name="Read-along" id="{e726103e-cc4e-f1ac-a07e-175ac918d0e8}">
+        <p14:section name="Read-along" id="{ab9ca627-39c8-d86e-41bb-39cd65d156ce}">
           <p14:sldIdLst>
             <p14:sldId id="260"/>
             <p14:sldId id="261"/>
           </p14:sldIdLst>
         </p14:section>
-        <p14:section name="Teach" id="{127d04b0-4b33-cc14-1cff-7b5a47b41ae8}">
+        <p14:section name="Teach" id="{24c1f9aa-5800-bf0d-b3fd-8c2859d08b8d}">
           <p14:sldIdLst>
             <p14:sldId id="262"/>
             <p14:sldId id="263"/>
@@ -157,7 +157,7 @@
             <p14:sldId id="266"/>
           </p14:sldIdLst>
         </p14:section>
-        <p14:section name="Routes" id="{9902badd-0a4b-ca83-0a7f-651a1a85106c}">
+        <p14:section name="Routes" id="{f5a7b39a-0c53-9bdf-7d9c-8ddeea56b589}">
           <p14:sldIdLst>
             <p14:sldId id="267"/>
             <p14:sldId id="268"/>
@@ -165,12 +165,12 @@
             <p14:sldId id="270"/>
           </p14:sldIdLst>
         </p14:section>
-        <p14:section name="Close" id="{2b1ee333-d11e-649f-a68a-23cd1faeedf0}">
+        <p14:section name="Close" id="{70628f19-bfea-1fce-dad6-e105565814fd}">
           <p14:sldIdLst>
             <p14:sldId id="271"/>
           </p14:sldIdLst>
         </p14:section>
-        <p14:section name="Answers" id="{0c9f4541-1af4-4dbd-2cd2-1256c310d917}">
+        <p14:section name="Answers" id="{26cbb8f0-d636-6949-d635-3778de6e22f7}">
           <p14:sldIdLst>
             <p14:sldId id="272"/>
             <p14:sldId id="273"/>
@@ -1236,7 +1236,7 @@
               <a:rPr lang="en-US" dirty="0"/>
               <a:t>Exit ticket — individual, silent, on a slip or mini-whiteboard. Recall before help: no notes, no lanes, no hints. Collect before pupils leave.
 Question: Which sentence uses pathetic fallacy?
-Answer: A   Rain hammered the window as Eliza wept over the letter.. Only the first sentence has weather (rain) that mirrors a feeling (grief). The fourth has weather that contrasts with the feeling; the others have no weather at all.
+Answer: B   Rain hammered the window as Eliza wept over the letter.. Only the first sentence has weather (rain) that mirrors a feeling (grief). The fourth has weather that contrasts with the feeling; the others have no weather at all.
 Source of this question: module 3 task ("Find the pathetic fallacy") from the manifest.
 Sort the slips: correct → ready to move on; incorrect → start next lesson in the pre-teach group, with the read-along and the Support lane. Same destination next time.</a:t>
             </a:r>
@@ -1606,7 +1606,7 @@
               <a:t>Do now — retrieval. Silent, no notes, no help: recall comes before any support. Give about four minutes.
 1. What is pathetic fallacy?  →  B   When the weather or nature reflects a character's feelings
 2. In Poe's description, the House of Usher has ___ eye-like windows.  →  vacant
-3. In what order did your lesson build a description?  →  B   Noun, adjective, verb, adverb
+3. In what order did your lesson build a description?  →  C   Noun, adjective, verb, adverb
 Circulate: who gets 3/3 (Stretch route), 2/3 (Core), 0–1 (Support)? Use this to route pupils later in the lesson.</a:t>
             </a:r>
             <a:endParaRPr lang="en-US" dirty="0"/>
@@ -1696,7 +1696,7 @@
             <a:r>
               <a:rPr lang="en-US" dirty="0"/>
               <a:t>Answers — exit ticket: Exit ticket. Reveal the answer; pupils mark their own work in a different colour, then read the "why" together. Same destination for every lane, so one answer serves the whole class.
-Answer: A   Rain hammered the window as Eliza wept over the letter.
+Answer: B   Rain hammered the window as Eliza wept over the letter.
 Why: Only the first sentence has weather (rain) that mirrors a feeling (grief). The fourth has weather that contrasts with the feeling; the others have no weather at all.
 Ask a Support pupil to explain one step, and a Stretch pupil to share their extension.</a:t>
             </a:r>
@@ -1789,7 +1789,7 @@
               <a:t>Answers — pupils mark their own in a different colour, then hands up for 3/3, 2/3, 1/3.
 1. B   When the weather or nature reflects a character's feelings. Pathetic comes from an old word for feeling, and fallacy means a mistaken idea: the weather seems to share our feelings.
 2. vacant. Vacant means empty. The windows are like eyes with nobody behind them, which is why the house feels dead and watching at once.
-3. B   Noun, adjective, verb, adverb. Name the thing (noun), describe it (adjective), make it do something (verb), say how (adverb). Each step adds to the last.
+3. C   Noun, adjective, verb, adverb. Name the thing (noun), describe it (adjective), make it do something (verb), say how (adverb). Each step adds to the last.
 Say the route each score points to: 3/3 Stretch, 2/3 Core, 0–1 Support. Pupils may choose to move up.</a:t>
             </a:r>
             <a:endParaRPr lang="en-US" dirty="0"/>
@@ -8981,7 +8981,7 @@
                 <a:ea typeface="Calibri" pitchFamily="34" charset="-122"/>
                 <a:cs typeface="Calibri" pitchFamily="34" charset="-120"/>
               </a:rPr>
-              <a:t>Rain hammered the window as Eliza wept over the letter.</a:t>
+              <a:t>The castle had twelve rooms, a tower and a well.</a:t>
             </a:r>
             <a:endParaRPr lang="en-US" sz="2400" dirty="0"/>
           </a:p>
@@ -9018,7 +9018,7 @@
                 <a:ea typeface="Calibri" pitchFamily="34" charset="-122"/>
                 <a:cs typeface="Calibri" pitchFamily="34" charset="-120"/>
               </a:rPr>
-              <a:t>Eliza ate her breakfast slowly and read the letter twice.</a:t>
+              <a:t>Rain hammered the window as Eliza wept over the letter.</a:t>
             </a:r>
             <a:endParaRPr lang="en-US" sz="2400" dirty="0"/>
           </a:p>
@@ -9055,7 +9055,7 @@
                 <a:ea typeface="Calibri" pitchFamily="34" charset="-122"/>
                 <a:cs typeface="Calibri" pitchFamily="34" charset="-120"/>
               </a:rPr>
-              <a:t>The castle had twelve rooms, a tower and a well.</a:t>
+              <a:t>The sun shone on the picnic while Eliza wept over the letter.</a:t>
             </a:r>
             <a:endParaRPr lang="en-US" sz="2400" dirty="0"/>
           </a:p>
@@ -9092,7 +9092,7 @@
                 <a:ea typeface="Calibri" pitchFamily="34" charset="-122"/>
                 <a:cs typeface="Calibri" pitchFamily="34" charset="-120"/>
               </a:rPr>
-              <a:t>The sun shone on the picnic while Eliza wept over the letter.</a:t>
+              <a:t>Eliza ate her breakfast slowly and read the letter twice.</a:t>
             </a:r>
             <a:endParaRPr lang="en-US" sz="2400" dirty="0"/>
           </a:p>
@@ -11214,7 +11214,7 @@
                 <a:ea typeface="Calibri" pitchFamily="34" charset="-122"/>
                 <a:cs typeface="Calibri" pitchFamily="34" charset="-120"/>
               </a:rPr>
-              <a:t>A character who is weak and pathetic</a:t>
+              <a:t>A list of adjectives before a noun</a:t>
             </a:r>
             <a:endParaRPr lang="en-US" sz="1800" dirty="0"/>
           </a:p>
@@ -11325,7 +11325,7 @@
                 <a:ea typeface="Calibri" pitchFamily="34" charset="-122"/>
                 <a:cs typeface="Calibri" pitchFamily="34" charset="-120"/>
               </a:rPr>
-              <a:t>A list of adjectives before a noun</a:t>
+              <a:t>A character who is weak and pathetic</a:t>
             </a:r>
             <a:endParaRPr lang="en-US" sz="1800" dirty="0"/>
           </a:p>
@@ -11764,7 +11764,7 @@
                 <a:ea typeface="Calibri" pitchFamily="34" charset="-122"/>
                 <a:cs typeface="Calibri" pitchFamily="34" charset="-120"/>
               </a:rPr>
-              <a:t>Noun, adjective, verb, adverb</a:t>
+              <a:t>Adjective, adverb, noun, verb</a:t>
             </a:r>
             <a:endParaRPr lang="en-US" sz="1800" dirty="0"/>
           </a:p>
@@ -11801,7 +11801,7 @@
                 <a:ea typeface="Calibri" pitchFamily="34" charset="-122"/>
                 <a:cs typeface="Calibri" pitchFamily="34" charset="-120"/>
               </a:rPr>
-              <a:t>Verb, noun, adverb, adjective</a:t>
+              <a:t>Noun, adjective, verb, adverb</a:t>
             </a:r>
             <a:endParaRPr lang="en-US" sz="1800" dirty="0"/>
           </a:p>
@@ -11838,7 +11838,7 @@
                 <a:ea typeface="Calibri" pitchFamily="34" charset="-122"/>
                 <a:cs typeface="Calibri" pitchFamily="34" charset="-120"/>
               </a:rPr>
-              <a:t>Adjective, adverb, noun, verb</a:t>
+              <a:t>Verb, noun, adverb, adjective</a:t>
             </a:r>
             <a:endParaRPr lang="en-US" sz="1800" dirty="0"/>
           </a:p>
@@ -12177,7 +12177,7 @@
                 <a:ea typeface="Cambria" pitchFamily="34" charset="-122"/>
                 <a:cs typeface="Cambria" pitchFamily="34" charset="-120"/>
               </a:rPr>
-              <a:t>A   Rain hammered the window as Eliza wept over the letter.</a:t>
+              <a:t>B   Rain hammered the window as Eliza wept over the letter.</a:t>
             </a:r>
             <a:endParaRPr lang="en-US" sz="1800" dirty="0"/>
           </a:p>
@@ -13198,7 +13198,7 @@
                 <a:ea typeface="Calibri" pitchFamily="34" charset="-122"/>
                 <a:cs typeface="Calibri" pitchFamily="34" charset="-120"/>
               </a:rPr>
-              <a:t>B   Noun, adjective, verb, adverb</a:t>
+              <a:t>C   Noun, adjective, verb, adverb</a:t>
             </a:r>
             <a:endParaRPr lang="en-US" sz="2200" dirty="0"/>
           </a:p>

--- a/decks/englit-gothic/englit-gothic_ch2_setting-and-atmosphere.pptx
+++ b/decks/englit-gothic/englit-gothic_ch2_setting-and-atmosphere.pptx
@@ -126,29 +126,29 @@
   <p:extLst>
     <p:ext uri="{521415D9-36F7-43E2-AB2F-B90AF26B5E84}">
       <p14:sectionLst xmlns:p14="http://schemas.microsoft.com/office/powerpoint/2010/main">
-        <p14:section name="Opening" id="{5ed663d3-d704-34fd-87ac-9c845cce0241}">
+        <p14:section name="Opening" id="{61959c8e-1360-359f-f62d-acdba01bfd28}">
           <p14:sldIdLst>
             <p14:sldId id="256"/>
           </p14:sldIdLst>
         </p14:section>
-        <p14:section name="Gate" id="{abe6af0b-4da9-cfee-4c8f-a78e09c8b85b}">
+        <p14:section name="Gate" id="{cb3d663a-b3dc-8ea8-9794-1eca4b79858d}">
           <p14:sldIdLst>
             <p14:sldId id="257"/>
             <p14:sldId id="258"/>
           </p14:sldIdLst>
         </p14:section>
-        <p14:section name="Pre-teach" id="{766bae50-174e-884e-c50f-46bc2718463b}">
+        <p14:section name="Pre-teach" id="{165d3973-ac90-892d-82fa-a8a74670a2a7}">
           <p14:sldIdLst>
             <p14:sldId id="259"/>
           </p14:sldIdLst>
         </p14:section>
-        <p14:section name="Read-along" id="{ab9ca627-39c8-d86e-41bb-39cd65d156ce}">
+        <p14:section name="Read-along" id="{182bbce3-37f5-09a1-b73c-f482900d7654}">
           <p14:sldIdLst>
             <p14:sldId id="260"/>
             <p14:sldId id="261"/>
           </p14:sldIdLst>
         </p14:section>
-        <p14:section name="Teach" id="{24c1f9aa-5800-bf0d-b3fd-8c2859d08b8d}">
+        <p14:section name="Teach" id="{bad7a81d-ffd9-e441-20b1-5dd66de72ff5}">
           <p14:sldIdLst>
             <p14:sldId id="262"/>
             <p14:sldId id="263"/>
@@ -157,7 +157,7 @@
             <p14:sldId id="266"/>
           </p14:sldIdLst>
         </p14:section>
-        <p14:section name="Routes" id="{f5a7b39a-0c53-9bdf-7d9c-8ddeea56b589}">
+        <p14:section name="Routes" id="{ccc2b1b3-3f08-0887-bc31-51f92732b163}">
           <p14:sldIdLst>
             <p14:sldId id="267"/>
             <p14:sldId id="268"/>
@@ -165,12 +165,12 @@
             <p14:sldId id="270"/>
           </p14:sldIdLst>
         </p14:section>
-        <p14:section name="Close" id="{70628f19-bfea-1fce-dad6-e105565814fd}">
+        <p14:section name="Close" id="{e1466a9f-25ac-62dc-f114-b8bb92243f2b}">
           <p14:sldIdLst>
             <p14:sldId id="271"/>
           </p14:sldIdLst>
         </p14:section>
-        <p14:section name="Answers" id="{26cbb8f0-d636-6949-d635-3778de6e22f7}">
+        <p14:section name="Answers" id="{d608a916-3f05-ae91-25a2-2e0621302cea}">
           <p14:sldIdLst>
             <p14:sldId id="272"/>
             <p14:sldId id="273"/>
